--- a/curso_es/pptx/S59.pptx
+++ b/curso_es/pptx/S59.pptx
@@ -6136,7 +6136,7 @@
                 </a:solidFill>
                 <a:latin typeface="Nunito Sans"/>
               </a:rPr>
-              <a:t>El efecto Dunning-Kruger no dice que quien sabe poco se crea un ______.  (sesión 47)</a:t>
+              <a:t>Ojo: el estudio de 1999 no dice que quien sabe poco se crea un ______.  (sesión 47)</a:t>
             </a:r>
           </a:p>
         </p:txBody>
@@ -6374,7 +6374,7 @@
                 </a:solidFill>
                 <a:latin typeface="Nunito Sans"/>
               </a:rPr>
-              <a:t>El efecto Dunning-Kruger no dice que quien sabe poco se crea un </a:t>
+              <a:t>Ojo: el estudio de 1999 no dice que quien sabe poco se crea un </a:t>
             </a:r>
             <a:r>
               <a:rPr sz="2600" b="1">
